--- a/temp/files/T1-temp.pptx
+++ b/temp/files/T1-temp.pptx
@@ -6170,8 +6170,8 @@
         </p:blipFill>
         <p:spPr>
           <a:xfrm>
-            <a:off x="426709" y="2255463"/>
-            <a:ext cx="6233004" cy="1203929"/>
+            <a:off x="426709" y="1569680"/>
+            <a:ext cx="6233004" cy="1889712"/>
           </a:xfrm>
           <a:prstGeom prst="rect">
             <a:avLst/>
@@ -6433,7 +6433,7 @@
                             </p:stCondLst>
                             <p:childTnLst>
                               <p:par>
-                                <p:cTn id="11" presetID="2" presetClass="entr" presetSubtype="8" fill="hold" decel="100000" grpId="0" nodeType="clickEffect">
+                                <p:cTn id="11" presetID="10" presetClass="entr" presetSubtype="0" fill="hold" grpId="0" nodeType="clickEffect">
                                   <p:stCondLst>
                                     <p:cond delay="0"/>
                                   </p:stCondLst>
@@ -6456,11 +6456,64 @@
                                         <p:strVal val="visible"/>
                                       </p:to>
                                     </p:set>
+                                    <p:animEffect transition="in" filter="fade">
+                                      <p:cBhvr>
+                                        <p:cTn id="13" dur="450"/>
+                                        <p:tgtEl>
+                                          <p:spTgt spid="4"/>
+                                        </p:tgtEl>
+                                      </p:cBhvr>
+                                    </p:animEffect>
+                                  </p:childTnLst>
+                                </p:cTn>
+                              </p:par>
+                            </p:childTnLst>
+                          </p:cTn>
+                        </p:par>
+                      </p:childTnLst>
+                    </p:cTn>
+                  </p:par>
+                  <p:par>
+                    <p:cTn id="14" fill="hold">
+                      <p:stCondLst>
+                        <p:cond delay="indefinite"/>
+                      </p:stCondLst>
+                      <p:childTnLst>
+                        <p:par>
+                          <p:cTn id="15" fill="hold">
+                            <p:stCondLst>
+                              <p:cond delay="0"/>
+                            </p:stCondLst>
+                            <p:childTnLst>
+                              <p:par>
+                                <p:cTn id="16" presetID="2" presetClass="entr" presetSubtype="8" fill="hold" decel="100000" grpId="0" nodeType="clickEffect">
+                                  <p:stCondLst>
+                                    <p:cond delay="0"/>
+                                  </p:stCondLst>
+                                  <p:childTnLst>
+                                    <p:set>
+                                      <p:cBhvr>
+                                        <p:cTn id="17" dur="1" fill="hold">
+                                          <p:stCondLst>
+                                            <p:cond delay="0"/>
+                                          </p:stCondLst>
+                                        </p:cTn>
+                                        <p:tgtEl>
+                                          <p:spTgt spid="5"/>
+                                        </p:tgtEl>
+                                        <p:attrNameLst>
+                                          <p:attrName>style.visibility</p:attrName>
+                                        </p:attrNameLst>
+                                      </p:cBhvr>
+                                      <p:to>
+                                        <p:strVal val="visible"/>
+                                      </p:to>
+                                    </p:set>
                                     <p:anim calcmode="lin" valueType="num">
                                       <p:cBhvr additive="base">
-                                        <p:cTn id="13" dur="550" fill="hold"/>
-                                        <p:tgtEl>
-                                          <p:spTgt spid="4"/>
+                                        <p:cTn id="18" dur="550" fill="hold"/>
+                                        <p:tgtEl>
+                                          <p:spTgt spid="5"/>
                                         </p:tgtEl>
                                         <p:attrNameLst>
                                           <p:attrName>ppt_x</p:attrName>
@@ -6481,9 +6534,9 @@
                                     </p:anim>
                                     <p:anim calcmode="lin" valueType="num">
                                       <p:cBhvr additive="base">
-                                        <p:cTn id="14" dur="550" fill="hold"/>
-                                        <p:tgtEl>
-                                          <p:spTgt spid="4"/>
+                                        <p:cTn id="19" dur="550" fill="hold"/>
+                                        <p:tgtEl>
+                                          <p:spTgt spid="5"/>
                                         </p:tgtEl>
                                         <p:attrNameLst>
                                           <p:attrName>ppt_y</p:attrName>
@@ -6512,32 +6565,32 @@
                     </p:cTn>
                   </p:par>
                   <p:par>
-                    <p:cTn id="15" fill="hold">
+                    <p:cTn id="20" fill="hold">
                       <p:stCondLst>
                         <p:cond delay="indefinite"/>
                       </p:stCondLst>
                       <p:childTnLst>
                         <p:par>
-                          <p:cTn id="16" fill="hold">
+                          <p:cTn id="21" fill="hold">
                             <p:stCondLst>
                               <p:cond delay="0"/>
                             </p:stCondLst>
                             <p:childTnLst>
                               <p:par>
-                                <p:cTn id="17" presetID="2" presetClass="entr" presetSubtype="8" fill="hold" decel="100000" grpId="0" nodeType="clickEffect">
+                                <p:cTn id="22" presetID="2" presetClass="entr" presetSubtype="8" fill="hold" decel="100000" grpId="0" nodeType="clickEffect">
                                   <p:stCondLst>
                                     <p:cond delay="0"/>
                                   </p:stCondLst>
                                   <p:childTnLst>
                                     <p:set>
                                       <p:cBhvr>
-                                        <p:cTn id="18" dur="1" fill="hold">
+                                        <p:cTn id="23" dur="1" fill="hold">
                                           <p:stCondLst>
                                             <p:cond delay="0"/>
                                           </p:stCondLst>
                                         </p:cTn>
                                         <p:tgtEl>
-                                          <p:spTgt spid="5"/>
+                                          <p:spTgt spid="6"/>
                                         </p:tgtEl>
                                         <p:attrNameLst>
                                           <p:attrName>style.visibility</p:attrName>
@@ -6549,9 +6602,9 @@
                                     </p:set>
                                     <p:anim calcmode="lin" valueType="num">
                                       <p:cBhvr additive="base">
-                                        <p:cTn id="19" dur="550" fill="hold"/>
-                                        <p:tgtEl>
-                                          <p:spTgt spid="5"/>
+                                        <p:cTn id="24" dur="550" fill="hold"/>
+                                        <p:tgtEl>
+                                          <p:spTgt spid="6"/>
                                         </p:tgtEl>
                                         <p:attrNameLst>
                                           <p:attrName>ppt_x</p:attrName>
@@ -6572,9 +6625,9 @@
                                     </p:anim>
                                     <p:anim calcmode="lin" valueType="num">
                                       <p:cBhvr additive="base">
-                                        <p:cTn id="20" dur="550" fill="hold"/>
-                                        <p:tgtEl>
-                                          <p:spTgt spid="5"/>
+                                        <p:cTn id="25" dur="550" fill="hold"/>
+                                        <p:tgtEl>
+                                          <p:spTgt spid="6"/>
                                         </p:tgtEl>
                                         <p:attrNameLst>
                                           <p:attrName>ppt_y</p:attrName>
@@ -6603,32 +6656,32 @@
                     </p:cTn>
                   </p:par>
                   <p:par>
-                    <p:cTn id="21" fill="hold">
+                    <p:cTn id="26" fill="hold">
                       <p:stCondLst>
                         <p:cond delay="indefinite"/>
                       </p:stCondLst>
                       <p:childTnLst>
                         <p:par>
-                          <p:cTn id="22" fill="hold">
+                          <p:cTn id="27" fill="hold">
                             <p:stCondLst>
                               <p:cond delay="0"/>
                             </p:stCondLst>
                             <p:childTnLst>
                               <p:par>
-                                <p:cTn id="23" presetID="2" presetClass="entr" presetSubtype="8" fill="hold" decel="100000" grpId="0" nodeType="clickEffect">
+                                <p:cTn id="28" presetID="2" presetClass="entr" presetSubtype="8" fill="hold" decel="100000" grpId="0" nodeType="clickEffect">
                                   <p:stCondLst>
                                     <p:cond delay="0"/>
                                   </p:stCondLst>
                                   <p:childTnLst>
                                     <p:set>
                                       <p:cBhvr>
-                                        <p:cTn id="24" dur="1" fill="hold">
+                                        <p:cTn id="29" dur="1" fill="hold">
                                           <p:stCondLst>
                                             <p:cond delay="0"/>
                                           </p:stCondLst>
                                         </p:cTn>
                                         <p:tgtEl>
-                                          <p:spTgt spid="6"/>
+                                          <p:spTgt spid="7"/>
                                         </p:tgtEl>
                                         <p:attrNameLst>
                                           <p:attrName>style.visibility</p:attrName>
@@ -6640,9 +6693,9 @@
                                     </p:set>
                                     <p:anim calcmode="lin" valueType="num">
                                       <p:cBhvr additive="base">
-                                        <p:cTn id="25" dur="550" fill="hold"/>
-                                        <p:tgtEl>
-                                          <p:spTgt spid="6"/>
+                                        <p:cTn id="30" dur="550" fill="hold"/>
+                                        <p:tgtEl>
+                                          <p:spTgt spid="7"/>
                                         </p:tgtEl>
                                         <p:attrNameLst>
                                           <p:attrName>ppt_x</p:attrName>
@@ -6663,9 +6716,9 @@
                                     </p:anim>
                                     <p:anim calcmode="lin" valueType="num">
                                       <p:cBhvr additive="base">
-                                        <p:cTn id="26" dur="550" fill="hold"/>
-                                        <p:tgtEl>
-                                          <p:spTgt spid="6"/>
+                                        <p:cTn id="31" dur="550" fill="hold"/>
+                                        <p:tgtEl>
+                                          <p:spTgt spid="7"/>
                                         </p:tgtEl>
                                         <p:attrNameLst>
                                           <p:attrName>ppt_y</p:attrName>
@@ -6694,32 +6747,32 @@
                     </p:cTn>
                   </p:par>
                   <p:par>
-                    <p:cTn id="27" fill="hold">
+                    <p:cTn id="32" fill="hold">
                       <p:stCondLst>
                         <p:cond delay="indefinite"/>
                       </p:stCondLst>
                       <p:childTnLst>
                         <p:par>
-                          <p:cTn id="28" fill="hold">
+                          <p:cTn id="33" fill="hold">
                             <p:stCondLst>
                               <p:cond delay="0"/>
                             </p:stCondLst>
                             <p:childTnLst>
                               <p:par>
-                                <p:cTn id="29" presetID="2" presetClass="entr" presetSubtype="8" fill="hold" decel="100000" grpId="0" nodeType="clickEffect">
+                                <p:cTn id="34" presetID="2" presetClass="entr" presetSubtype="4" fill="hold" decel="100000" grpId="0" nodeType="clickEffect">
                                   <p:stCondLst>
                                     <p:cond delay="0"/>
                                   </p:stCondLst>
                                   <p:childTnLst>
                                     <p:set>
                                       <p:cBhvr>
-                                        <p:cTn id="30" dur="1" fill="hold">
+                                        <p:cTn id="35" dur="1" fill="hold">
                                           <p:stCondLst>
                                             <p:cond delay="0"/>
                                           </p:stCondLst>
                                         </p:cTn>
                                         <p:tgtEl>
-                                          <p:spTgt spid="7"/>
+                                          <p:spTgt spid="8"/>
                                         </p:tgtEl>
                                         <p:attrNameLst>
                                           <p:attrName>style.visibility</p:attrName>
@@ -6731,9 +6784,9 @@
                                     </p:set>
                                     <p:anim calcmode="lin" valueType="num">
                                       <p:cBhvr additive="base">
-                                        <p:cTn id="31" dur="550" fill="hold"/>
-                                        <p:tgtEl>
-                                          <p:spTgt spid="7"/>
+                                        <p:cTn id="36" dur="550" fill="hold"/>
+                                        <p:tgtEl>
+                                          <p:spTgt spid="8"/>
                                         </p:tgtEl>
                                         <p:attrNameLst>
                                           <p:attrName>ppt_x</p:attrName>
@@ -6742,7 +6795,7 @@
                                       <p:tavLst>
                                         <p:tav tm="0">
                                           <p:val>
-                                            <p:strVal val="0-#ppt_w/2"/>
+                                            <p:strVal val="#ppt_x"/>
                                           </p:val>
                                         </p:tav>
                                         <p:tav tm="100000">
@@ -6754,98 +6807,7 @@
                                     </p:anim>
                                     <p:anim calcmode="lin" valueType="num">
                                       <p:cBhvr additive="base">
-                                        <p:cTn id="32" dur="550" fill="hold"/>
-                                        <p:tgtEl>
-                                          <p:spTgt spid="7"/>
-                                        </p:tgtEl>
-                                        <p:attrNameLst>
-                                          <p:attrName>ppt_y</p:attrName>
-                                        </p:attrNameLst>
-                                      </p:cBhvr>
-                                      <p:tavLst>
-                                        <p:tav tm="0">
-                                          <p:val>
-                                            <p:strVal val="#ppt_y"/>
-                                          </p:val>
-                                        </p:tav>
-                                        <p:tav tm="100000">
-                                          <p:val>
-                                            <p:strVal val="#ppt_y"/>
-                                          </p:val>
-                                        </p:tav>
-                                      </p:tavLst>
-                                    </p:anim>
-                                  </p:childTnLst>
-                                </p:cTn>
-                              </p:par>
-                            </p:childTnLst>
-                          </p:cTn>
-                        </p:par>
-                      </p:childTnLst>
-                    </p:cTn>
-                  </p:par>
-                  <p:par>
-                    <p:cTn id="33" fill="hold">
-                      <p:stCondLst>
-                        <p:cond delay="indefinite"/>
-                      </p:stCondLst>
-                      <p:childTnLst>
-                        <p:par>
-                          <p:cTn id="34" fill="hold">
-                            <p:stCondLst>
-                              <p:cond delay="0"/>
-                            </p:stCondLst>
-                            <p:childTnLst>
-                              <p:par>
-                                <p:cTn id="35" presetID="2" presetClass="entr" presetSubtype="4" fill="hold" decel="100000" grpId="0" nodeType="clickEffect">
-                                  <p:stCondLst>
-                                    <p:cond delay="0"/>
-                                  </p:stCondLst>
-                                  <p:childTnLst>
-                                    <p:set>
-                                      <p:cBhvr>
-                                        <p:cTn id="36" dur="1" fill="hold">
-                                          <p:stCondLst>
-                                            <p:cond delay="0"/>
-                                          </p:stCondLst>
-                                        </p:cTn>
-                                        <p:tgtEl>
-                                          <p:spTgt spid="8"/>
-                                        </p:tgtEl>
-                                        <p:attrNameLst>
-                                          <p:attrName>style.visibility</p:attrName>
-                                        </p:attrNameLst>
-                                      </p:cBhvr>
-                                      <p:to>
-                                        <p:strVal val="visible"/>
-                                      </p:to>
-                                    </p:set>
-                                    <p:anim calcmode="lin" valueType="num">
-                                      <p:cBhvr additive="base">
                                         <p:cTn id="37" dur="550" fill="hold"/>
-                                        <p:tgtEl>
-                                          <p:spTgt spid="8"/>
-                                        </p:tgtEl>
-                                        <p:attrNameLst>
-                                          <p:attrName>ppt_x</p:attrName>
-                                        </p:attrNameLst>
-                                      </p:cBhvr>
-                                      <p:tavLst>
-                                        <p:tav tm="0">
-                                          <p:val>
-                                            <p:strVal val="#ppt_x"/>
-                                          </p:val>
-                                        </p:tav>
-                                        <p:tav tm="100000">
-                                          <p:val>
-                                            <p:strVal val="#ppt_x"/>
-                                          </p:val>
-                                        </p:tav>
-                                      </p:tavLst>
-                                    </p:anim>
-                                    <p:anim calcmode="lin" valueType="num">
-                                      <p:cBhvr additive="base">
-                                        <p:cTn id="38" dur="550" fill="hold"/>
                                         <p:tgtEl>
                                           <p:spTgt spid="8"/>
                                         </p:tgtEl>
